--- a/docs/2026_ゲーム制作集中講座 Bグループ.pptx
+++ b/docs/2026_ゲーム制作集中講座 Bグループ.pptx
@@ -120,10 +120,16 @@
 </p:presentation>
 </file>
 
+<file path=ppt/authors.xml><?xml version="1.0" encoding="utf-8"?>
+<p188:authorLst xmlns:a="http://schemas.openxmlformats.org/drawingml/2006/main" xmlns:r="http://schemas.openxmlformats.org/officeDocument/2006/relationships" xmlns:p188="http://schemas.microsoft.com/office/powerpoint/2018/8/main">
+  <p188:author id="{F443D4DE-73AD-836A-0437-94A055F37F2F}" name="伊織 山上" initials="伊山" userId="90f08136a302d706" providerId="Windows Live"/>
+</p188:authorLst>
+</file>
+
 <file path=ppt/revisionInfo.xml><?xml version="1.0" encoding="utf-8"?>
 <p1510:revInfo xmlns:a="http://schemas.openxmlformats.org/drawingml/2006/main" xmlns:r="http://schemas.openxmlformats.org/officeDocument/2006/relationships" xmlns:p1510="http://schemas.microsoft.com/office/powerpoint/2015/10/main">
   <p1510:revLst>
-    <p1510:client id="{6D905C5F-90C7-4343-9166-AFEE1A228E26}" v="5" dt="2026-08-01T02:20:58.530"/>
+    <p1510:client id="{6D905C5F-90C7-4343-9166-AFEE1A228E26}" v="7" dt="2026-08-01T03:21:18.884"/>
   </p1510:revLst>
 </p1510:revInfo>
 </file>
@@ -132,8 +138,8 @@
 <pc:chgInfo xmlns:a="http://schemas.openxmlformats.org/drawingml/2006/main" xmlns:r="http://schemas.openxmlformats.org/officeDocument/2006/relationships" xmlns:ac="http://schemas.microsoft.com/office/drawing/2013/main/command" xmlns:pc="http://schemas.microsoft.com/office/powerpoint/2013/main/command">
   <pc:docChgLst>
     <pc:chgData name="伊織 山上" userId="90f08136a302d706" providerId="LiveId" clId="{095016DE-EB44-42F1-9CF0-529A106C7010}"/>
-    <pc:docChg chg="undo custSel addSld modSld">
-      <pc:chgData name="伊織 山上" userId="90f08136a302d706" providerId="LiveId" clId="{095016DE-EB44-42F1-9CF0-529A106C7010}" dt="2026-08-01T02:23:25.770" v="301" actId="20577"/>
+    <pc:docChg chg="undo custSel addSld delSld modSld">
+      <pc:chgData name="伊織 山上" userId="90f08136a302d706" providerId="LiveId" clId="{095016DE-EB44-42F1-9CF0-529A106C7010}" dt="2026-08-01T03:44:11.259" v="1437" actId="20577"/>
       <pc:docMkLst>
         <pc:docMk/>
       </pc:docMkLst>
@@ -177,7 +183,7 @@
         </pc:spChg>
       </pc:sldChg>
       <pc:sldChg chg="modSp mod">
-        <pc:chgData name="伊織 山上" userId="90f08136a302d706" providerId="LiveId" clId="{095016DE-EB44-42F1-9CF0-529A106C7010}" dt="2026-08-01T02:23:15.840" v="295" actId="20577"/>
+        <pc:chgData name="伊織 山上" userId="90f08136a302d706" providerId="LiveId" clId="{095016DE-EB44-42F1-9CF0-529A106C7010}" dt="2026-08-01T03:11:18.862" v="306" actId="20577"/>
         <pc:sldMkLst>
           <pc:docMk/>
           <pc:sldMk cId="2608576585" sldId="1012"/>
@@ -188,6 +194,22 @@
             <pc:docMk/>
             <pc:sldMk cId="2608576585" sldId="1012"/>
             <ac:spMk id="8" creationId="{286974F4-2D6C-E5EB-234F-15727AC3D010}"/>
+          </ac:spMkLst>
+        </pc:spChg>
+        <pc:spChg chg="mod">
+          <ac:chgData name="伊織 山上" userId="90f08136a302d706" providerId="LiveId" clId="{095016DE-EB44-42F1-9CF0-529A106C7010}" dt="2026-08-01T03:11:18.862" v="306" actId="20577"/>
+          <ac:spMkLst>
+            <pc:docMk/>
+            <pc:sldMk cId="2608576585" sldId="1012"/>
+            <ac:spMk id="13" creationId="{1CD8F99F-2A97-DD42-0129-F59E85FC897A}"/>
+          </ac:spMkLst>
+        </pc:spChg>
+        <pc:spChg chg="mod">
+          <ac:chgData name="伊織 山上" userId="90f08136a302d706" providerId="LiveId" clId="{095016DE-EB44-42F1-9CF0-529A106C7010}" dt="2026-08-01T03:11:06.067" v="302" actId="1076"/>
+          <ac:spMkLst>
+            <pc:docMk/>
+            <pc:sldMk cId="2608576585" sldId="1012"/>
+            <ac:spMk id="16" creationId="{EA45E668-58E8-32B3-6C40-F5EDEDB3123F}"/>
           </ac:spMkLst>
         </pc:spChg>
       </pc:sldChg>
@@ -206,8 +228,8 @@
           </ac:spMkLst>
         </pc:spChg>
       </pc:sldChg>
-      <pc:sldChg chg="addSp delSp modSp mod">
-        <pc:chgData name="伊織 山上" userId="90f08136a302d706" providerId="LiveId" clId="{095016DE-EB44-42F1-9CF0-529A106C7010}" dt="2026-08-01T02:11:32.130" v="120" actId="167"/>
+      <pc:sldChg chg="addSp delSp modSp mod modNotesTx">
+        <pc:chgData name="伊織 山上" userId="90f08136a302d706" providerId="LiveId" clId="{095016DE-EB44-42F1-9CF0-529A106C7010}" dt="2026-08-01T03:22:26.665" v="668" actId="20577"/>
         <pc:sldMkLst>
           <pc:docMk/>
           <pc:sldMk cId="3992013898" sldId="1074"/>
@@ -325,8 +347,8 @@
           </ac:cxnSpMkLst>
         </pc:cxnChg>
       </pc:sldChg>
-      <pc:sldChg chg="addSp delSp modSp mod">
-        <pc:chgData name="伊織 山上" userId="90f08136a302d706" providerId="LiveId" clId="{095016DE-EB44-42F1-9CF0-529A106C7010}" dt="2026-08-01T02:21:17.370" v="227" actId="1076"/>
+      <pc:sldChg chg="addSp delSp modSp mod modNotesTx">
+        <pc:chgData name="伊織 山上" userId="90f08136a302d706" providerId="LiveId" clId="{095016DE-EB44-42F1-9CF0-529A106C7010}" dt="2026-08-01T03:43:53.422" v="1392" actId="20577"/>
         <pc:sldMkLst>
           <pc:docMk/>
           <pc:sldMk cId="2787609970" sldId="1075"/>
@@ -396,8 +418,8 @@
           </ac:picMkLst>
         </pc:picChg>
       </pc:sldChg>
-      <pc:sldChg chg="addSp modSp new mod">
-        <pc:chgData name="伊織 山上" userId="90f08136a302d706" providerId="LiveId" clId="{095016DE-EB44-42F1-9CF0-529A106C7010}" dt="2026-08-01T02:21:43.962" v="228" actId="14100"/>
+      <pc:sldChg chg="addSp modSp new mod modNotesTx">
+        <pc:chgData name="伊織 山上" userId="90f08136a302d706" providerId="LiveId" clId="{095016DE-EB44-42F1-9CF0-529A106C7010}" dt="2026-08-01T03:44:11.259" v="1437" actId="20577"/>
         <pc:sldMkLst>
           <pc:docMk/>
           <pc:sldMk cId="3849813796" sldId="1076"/>
@@ -458,6 +480,21 @@
             <ac:cxnSpMk id="13" creationId="{121D6A09-AC5F-56FC-C943-E9DAAD011010}"/>
           </ac:cxnSpMkLst>
         </pc:cxnChg>
+      </pc:sldChg>
+      <pc:sldChg chg="addSp modSp new del mod">
+        <pc:chgData name="伊織 山上" userId="90f08136a302d706" providerId="LiveId" clId="{095016DE-EB44-42F1-9CF0-529A106C7010}" dt="2026-08-01T03:21:14.633" v="558" actId="47"/>
+        <pc:sldMkLst>
+          <pc:docMk/>
+          <pc:sldMk cId="2987247828" sldId="1077"/>
+        </pc:sldMkLst>
+        <pc:spChg chg="add mod">
+          <ac:chgData name="伊織 山上" userId="90f08136a302d706" providerId="LiveId" clId="{095016DE-EB44-42F1-9CF0-529A106C7010}" dt="2026-08-01T03:15:46.166" v="557" actId="20577"/>
+          <ac:spMkLst>
+            <pc:docMk/>
+            <pc:sldMk cId="2987247828" sldId="1077"/>
+            <ac:spMk id="3" creationId="{CB1DB2D8-5EC9-1A68-DFB4-ABADF6885326}"/>
+          </ac:spMkLst>
+        </pc:spChg>
       </pc:sldChg>
     </pc:docChg>
   </pc:docChgLst>
@@ -1124,6 +1161,69 @@
           </a:bodyPr>
           <a:lstStyle/>
           <a:p>
+            <a:r>
+              <a:rPr kumimoji="1" lang="ja-JP" altLang="en-US" dirty="0"/>
+              <a:t>計</a:t>
+            </a:r>
+            <a:r>
+              <a:rPr kumimoji="1" lang="en-US" altLang="ja-JP" dirty="0"/>
+              <a:t>4</a:t>
+            </a:r>
+            <a:r>
+              <a:rPr kumimoji="1" lang="ja-JP" altLang="en-US" dirty="0"/>
+              <a:t>ステージで</a:t>
+            </a:r>
+            <a:r>
+              <a:rPr kumimoji="1" lang="en-US" altLang="ja-JP" dirty="0"/>
+              <a:t>1</a:t>
+            </a:r>
+            <a:r>
+              <a:rPr kumimoji="1" lang="ja-JP" altLang="en-US" dirty="0"/>
+              <a:t>ステージあたり</a:t>
+            </a:r>
+            <a:r>
+              <a:rPr kumimoji="1" lang="en-US" altLang="ja-JP" dirty="0"/>
+              <a:t>30</a:t>
+            </a:r>
+            <a:r>
+              <a:rPr kumimoji="1" lang="ja-JP" altLang="en-US" dirty="0"/>
+              <a:t>秒</a:t>
+            </a:r>
+            <a:endParaRPr kumimoji="1" lang="en-US" altLang="ja-JP" dirty="0"/>
+          </a:p>
+          <a:p>
+            <a:r>
+              <a:rPr kumimoji="1" lang="ja-JP" altLang="en-US" dirty="0"/>
+              <a:t>沖縄　西日本　東日本　北海道　の順番に進んでいき、難易度は徐々に上がる。</a:t>
+            </a:r>
+            <a:endParaRPr kumimoji="1" lang="en-US" altLang="ja-JP" dirty="0"/>
+          </a:p>
+          <a:p>
+            <a:r>
+              <a:rPr kumimoji="1" lang="en-US" altLang="ja-JP" dirty="0"/>
+              <a:t>30</a:t>
+            </a:r>
+            <a:r>
+              <a:rPr kumimoji="1" lang="ja-JP" altLang="en-US" dirty="0"/>
+              <a:t>秒以内にたどり着かないと</a:t>
+            </a:r>
+            <a:r>
+              <a:rPr kumimoji="1" lang="en-US" altLang="ja-JP" dirty="0"/>
+              <a:t>Game Over</a:t>
+            </a:r>
+          </a:p>
+          <a:p>
+            <a:r>
+              <a:rPr kumimoji="1" lang="ja-JP" altLang="en-US" sz="1200" kern="0" baseline="0" dirty="0">
+                <a:solidFill>
+                  <a:schemeClr val="tx1"/>
+                </a:solidFill>
+                <a:latin typeface="+mn-ea"/>
+                <a:ea typeface="ＭＳ Ｐゴシック" pitchFamily="-84" charset="-128"/>
+                <a:cs typeface="ＭＳ Ｐゴシック" pitchFamily="-84" charset="-128"/>
+              </a:rPr>
+              <a:t>時間以内に進むための注意すべきポイントは血糖値</a:t>
+            </a:r>
             <a:endParaRPr kumimoji="1" lang="en-US" altLang="ja-JP" sz="1200" kern="0" baseline="0" dirty="0">
               <a:solidFill>
                 <a:schemeClr val="tx1"/>
@@ -1184,6 +1284,136 @@
 </file>
 
 <file path=ppt/notesSlides/notesSlide4.xml><?xml version="1.0" encoding="utf-8"?>
+<p:notes xmlns:a="http://schemas.openxmlformats.org/drawingml/2006/main" xmlns:r="http://schemas.openxmlformats.org/officeDocument/2006/relationships" xmlns:p="http://schemas.openxmlformats.org/presentationml/2006/main">
+  <p:cSld>
+    <p:spTree>
+      <p:nvGrpSpPr>
+        <p:cNvPr id="1" name=""/>
+        <p:cNvGrpSpPr/>
+        <p:nvPr/>
+      </p:nvGrpSpPr>
+      <p:grpSpPr>
+        <a:xfrm>
+          <a:off x="0" y="0"/>
+          <a:ext cx="0" cy="0"/>
+          <a:chOff x="0" y="0"/>
+          <a:chExt cx="0" cy="0"/>
+        </a:xfrm>
+      </p:grpSpPr>
+      <p:sp>
+        <p:nvSpPr>
+          <p:cNvPr id="2" name="スライド イメージ プレースホルダー 1"/>
+          <p:cNvSpPr>
+            <a:spLocks noGrp="1" noRot="1" noChangeAspect="1"/>
+          </p:cNvSpPr>
+          <p:nvPr>
+            <p:ph type="sldImg"/>
+          </p:nvPr>
+        </p:nvSpPr>
+        <p:spPr/>
+      </p:sp>
+      <p:sp>
+        <p:nvSpPr>
+          <p:cNvPr id="3" name="ノート プレースホルダー 2"/>
+          <p:cNvSpPr>
+            <a:spLocks noGrp="1"/>
+          </p:cNvSpPr>
+          <p:nvPr>
+            <p:ph type="body" idx="1"/>
+          </p:nvPr>
+        </p:nvSpPr>
+        <p:spPr/>
+        <p:txBody>
+          <a:bodyPr/>
+          <a:lstStyle/>
+          <a:p>
+            <a:r>
+              <a:rPr kumimoji="1" lang="ja-JP" altLang="en-US" dirty="0"/>
+              <a:t>血糖値の調整には食べ物とマンジャロの利用</a:t>
+            </a:r>
+            <a:endParaRPr kumimoji="1" lang="en-US" altLang="ja-JP" dirty="0"/>
+          </a:p>
+          <a:p>
+            <a:r>
+              <a:rPr kumimoji="1" lang="ja-JP" altLang="en-US" dirty="0"/>
+              <a:t>血糖値は常に下がる</a:t>
+            </a:r>
+            <a:endParaRPr kumimoji="1" lang="en-US" altLang="ja-JP" dirty="0"/>
+          </a:p>
+          <a:p>
+            <a:r>
+              <a:rPr kumimoji="1" lang="ja-JP" altLang="en-US" dirty="0"/>
+              <a:t>食べ物を食べると血糖値が上がる。</a:t>
+            </a:r>
+            <a:endParaRPr kumimoji="1" lang="en-US" altLang="ja-JP" dirty="0"/>
+          </a:p>
+          <a:p>
+            <a:r>
+              <a:rPr kumimoji="1" lang="ja-JP" altLang="en-US" dirty="0"/>
+              <a:t>マンジャロの利用で食べ物を無視することができる</a:t>
+            </a:r>
+            <a:endParaRPr kumimoji="1" lang="en-US" altLang="ja-JP" dirty="0"/>
+          </a:p>
+          <a:p>
+            <a:r>
+              <a:rPr kumimoji="1" lang="ja-JP" altLang="en-US" dirty="0"/>
+              <a:t>エナジードリンクは血糖値が大幅に大きくなるが、加速することができる。</a:t>
+            </a:r>
+            <a:endParaRPr kumimoji="1" lang="en-US" altLang="ja-JP" dirty="0"/>
+          </a:p>
+          <a:p>
+            <a:r>
+              <a:rPr kumimoji="1" lang="ja-JP" altLang="en-US"/>
+              <a:t>マンジャロとエナドリの使い方が大事</a:t>
+            </a:r>
+            <a:endParaRPr kumimoji="1" lang="en-US" altLang="ja-JP" dirty="0"/>
+          </a:p>
+          <a:p>
+            <a:r>
+              <a:rPr kumimoji="1" lang="ja-JP" altLang="en-US" dirty="0"/>
+              <a:t>バリケードに当たったら一定時間スタンする。</a:t>
+            </a:r>
+            <a:endParaRPr kumimoji="1" lang="en-US" altLang="ja-JP" dirty="0"/>
+          </a:p>
+        </p:txBody>
+      </p:sp>
+      <p:sp>
+        <p:nvSpPr>
+          <p:cNvPr id="4" name="スライド番号プレースホルダー 3"/>
+          <p:cNvSpPr>
+            <a:spLocks noGrp="1"/>
+          </p:cNvSpPr>
+          <p:nvPr>
+            <p:ph type="sldNum" sz="quarter" idx="5"/>
+          </p:nvPr>
+        </p:nvSpPr>
+        <p:spPr/>
+        <p:txBody>
+          <a:bodyPr/>
+          <a:lstStyle/>
+          <a:p>
+            <a:fld id="{462E0879-B195-4ED9-906E-67BE0559900B}" type="slidenum">
+              <a:rPr kumimoji="1" lang="ja-JP" altLang="en-US" smtClean="0"/>
+              <a:t>5</a:t>
+            </a:fld>
+            <a:endParaRPr kumimoji="1" lang="ja-JP" altLang="en-US"/>
+          </a:p>
+        </p:txBody>
+      </p:sp>
+    </p:spTree>
+    <p:extLst>
+      <p:ext uri="{BB962C8B-B14F-4D97-AF65-F5344CB8AC3E}">
+        <p14:creationId xmlns:p14="http://schemas.microsoft.com/office/powerpoint/2010/main" val="583444396"/>
+      </p:ext>
+    </p:extLst>
+  </p:cSld>
+  <p:clrMapOvr>
+    <a:masterClrMapping/>
+  </p:clrMapOvr>
+</p:notes>
+</file>
+
+<file path=ppt/notesSlides/notesSlide5.xml><?xml version="1.0" encoding="utf-8"?>
 <p:notes xmlns:a="http://schemas.openxmlformats.org/drawingml/2006/main" xmlns:r="http://schemas.openxmlformats.org/officeDocument/2006/relationships" xmlns:p="http://schemas.openxmlformats.org/presentationml/2006/main">
   <p:cSld>
     <p:spTree>
@@ -1247,6 +1477,49 @@
           </a:bodyPr>
           <a:lstStyle/>
           <a:p>
+            <a:r>
+              <a:rPr kumimoji="1" lang="ja-JP" altLang="en-US" sz="1200" kern="0" baseline="0" dirty="0">
+                <a:solidFill>
+                  <a:schemeClr val="tx1"/>
+                </a:solidFill>
+                <a:latin typeface="+mn-ea"/>
+                <a:ea typeface="ＭＳ Ｐゴシック" pitchFamily="-84" charset="-128"/>
+                <a:cs typeface="ＭＳ Ｐゴシック" pitchFamily="-84" charset="-128"/>
+              </a:rPr>
+              <a:t>血糖値を保つ理由は、長時間高血圧になったり、低血圧になりすぎた場合スタンしてしまうからである。</a:t>
+            </a:r>
+            <a:endParaRPr kumimoji="1" lang="en-US" altLang="ja-JP" sz="1200" kern="0" baseline="0" dirty="0">
+              <a:solidFill>
+                <a:schemeClr val="tx1"/>
+              </a:solidFill>
+              <a:latin typeface="+mn-ea"/>
+              <a:ea typeface="ＭＳ Ｐゴシック" pitchFamily="-84" charset="-128"/>
+              <a:cs typeface="ＭＳ Ｐゴシック" pitchFamily="-84" charset="-128"/>
+            </a:endParaRPr>
+          </a:p>
+          <a:p>
+            <a:r>
+              <a:rPr kumimoji="1" lang="en-US" altLang="ja-JP" sz="1200" kern="0" baseline="0" dirty="0">
+                <a:solidFill>
+                  <a:schemeClr val="tx1"/>
+                </a:solidFill>
+                <a:latin typeface="+mn-ea"/>
+                <a:ea typeface="ＭＳ Ｐゴシック" pitchFamily="-84" charset="-128"/>
+                <a:cs typeface="ＭＳ Ｐゴシック" pitchFamily="-84" charset="-128"/>
+              </a:rPr>
+              <a:t>30</a:t>
+            </a:r>
+            <a:r>
+              <a:rPr kumimoji="1" lang="ja-JP" altLang="en-US" sz="1200" kern="0" baseline="0" dirty="0">
+                <a:solidFill>
+                  <a:schemeClr val="tx1"/>
+                </a:solidFill>
+                <a:latin typeface="+mn-ea"/>
+                <a:ea typeface="ＭＳ Ｐゴシック" pitchFamily="-84" charset="-128"/>
+                <a:cs typeface="ＭＳ Ｐゴシック" pitchFamily="-84" charset="-128"/>
+              </a:rPr>
+              <a:t>秒以内に各ステージにたどり着かなかったらゲームオーバーだから、いかにスタンせずにスピードを出してたどり着けるかが大事です。。</a:t>
+            </a:r>
             <a:endParaRPr kumimoji="1" lang="en-US" altLang="ja-JP" sz="1200" kern="0" baseline="0" dirty="0">
               <a:solidFill>
                 <a:schemeClr val="tx1"/>
@@ -6912,7 +7185,7 @@
         </p:nvSpPr>
         <p:spPr>
           <a:xfrm>
-            <a:off x="1563818" y="3971905"/>
+            <a:off x="1579028" y="3967262"/>
             <a:ext cx="6241519" cy="1402210"/>
           </a:xfrm>
           <a:prstGeom prst="roundRect">
@@ -7782,7 +8055,7 @@
           <p:nvPr/>
         </p:nvPicPr>
         <p:blipFill>
-          <a:blip r:embed="rId2">
+          <a:blip r:embed="rId3">
             <a:extLst>
               <a:ext uri="{28A0092B-C50C-407E-A947-70E740481C1C}">
                 <a14:useLocalDpi xmlns:a14="http://schemas.microsoft.com/office/drawing/2010/main" val="0"/>
